--- a/unpruuf/presentations/export/unpruuf_Business_RO.pptx
+++ b/unpruuf/presentations/export/unpruuf_Business_RO.pptx
@@ -19,8 +19,11 @@
     <p:sldId id="267" r:id="rId19"/>
     <p:sldId id="268" r:id="rId20"/>
     <p:sldId id="269" r:id="rId21"/>
+    <p:sldId id="270" r:id="rId22"/>
+    <p:sldId id="271" r:id="rId23"/>
+    <p:sldId id="272" r:id="rId24"/>
   </p:sldIdLst>
-  <p:sldSz cx="12192000" cy="6858000" type="screen4x3"/>
+  <p:sldSz cx="12191695" cy="6858000" type="screen4x3"/>
   <p:notesSz cx="6858000" cy="9144000"/>
   <p:defaultTextStyle>
     <a:defPPr>
@@ -515,7 +518,7 @@
           <a:lstStyle/>
           <a:p>
             <a:r>
-              <a:t>Mesajul central: nu vindem un serviciu de mesagerie. Construim pentru client propriul sistem de comunicare, pe care NexonAI nu îl operează.</a:t>
+              <a:t>Mesajul central: nu vindem un serviciu de mesagerie. Livrăm clientului propriul sistem de comunicare. NexonAI nu operează servere, serverele aparțin întotdeauna clientului.</a:t>
             </a:r>
           </a:p>
         </p:txBody>
@@ -585,7 +588,7 @@
           <a:lstStyle/>
           <a:p>
             <a:r>
-              <a:t>Serverul este instrumentul: cu el, fiecare utilizator își creează propriul sistem de comunicare anonim. NexonAI nu găzduiește nimic.</a:t>
+              <a:t>Serverul este instrumentul: cu el, fiecare client își construiește propriul sistem de comunicare. Generează întotdeauna numărul complet licențiat de adrese, cel mult 250. NexonAI nu găzduiește nimic.</a:t>
             </a:r>
           </a:p>
         </p:txBody>
@@ -655,7 +658,7 @@
           <a:lstStyle/>
           <a:p>
             <a:r>
-              <a:t>A scrie pe nodurile proprii, B preia de acolo. Drumul înapoi trece prin nodurile lui B. Nimeni nu scrie pe nodurile altcuiva.</a:t>
+              <a:t>Fiecare mesaj merge la toate cele trei noduri ale contactului, pe trei servere diferite. Dacă unul sau chiar două cad, mesajul este încă acolo. Contactul le verifică pe toate trei. Drumul înapoi trece prin nodurile contactului.</a:t>
             </a:r>
           </a:p>
         </p:txBody>
@@ -725,7 +728,7 @@
           <a:lstStyle/>
           <a:p>
             <a:r>
-              <a:t>Măsurat fără rețeaua Tor live: 500 de noduri într-un proces aproximativ 85 MB RAM. Sarcina de rețea pe un VPS real urmează să fie măsurată.</a:t>
+              <a:t>Măsurat fără rețeaua Tor reală: 500 de noduri într-un proces, aproximativ 85 MB RAM. Încărcarea rețelei pe un VPS real nu este încă măsurată. 250 de contacte este valabil la trei servere cu câte 250 de noduri, fiindcă fiecare contact primește un nod pe server.</a:t>
             </a:r>
           </a:p>
         </p:txBody>
@@ -795,7 +798,217 @@
           <a:lstStyle/>
           <a:p>
             <a:r>
-              <a:t>Formulare atentă: nu spunem că citațiile sau ordinele judecătorești sunt inutile. Spunem că nu există un furnizor care să predea ceva și că un nod confiscat nu conține nimic lizibil.</a:t>
+              <a:t>Recomandarea trei furnizori, două țări rămâne la latitudinea clientului: aplicația nu poate verifica dacă trei servere sunt la același furnizor. După o repornire, fiecare server rămâne blocat până când aplicația îl deblochează. Cât timp unul este blocat, ceilalți preiau.</a:t>
+            </a:r>
+          </a:p>
+        </p:txBody>
+      </p:sp>
+      <p:sp>
+        <p:nvSpPr>
+          <p:cNvPr id="4" name="Slide Number Placeholder 3"/>
+          <p:cNvSpPr>
+            <a:spLocks noGrp="1"/>
+          </p:cNvSpPr>
+          <p:nvPr>
+            <p:ph type="sldNum" idx="5" sz="quarter"/>
+          </p:nvPr>
+        </p:nvSpPr>
+        <p:spPr/>
+      </p:sp>
+    </p:spTree>
+  </p:cSld>
+  <p:clrMapOvr>
+    <a:masterClrMapping/>
+  </p:clrMapOvr>
+</p:notes>
+</file>
+
+<file path=ppt/notesSlides/notesSlide6.xml><?xml version="1.0" encoding="utf-8"?>
+<p:notes xmlns:a="http://schemas.openxmlformats.org/drawingml/2006/main" xmlns:p="http://schemas.openxmlformats.org/presentationml/2006/main" xmlns:r="http://schemas.openxmlformats.org/officeDocument/2006/relationships">
+  <p:cSld>
+    <p:spTree>
+      <p:nvGrpSpPr>
+        <p:cNvPr id="1" name=""/>
+        <p:cNvGrpSpPr/>
+        <p:nvPr/>
+      </p:nvGrpSpPr>
+      <p:grpSpPr>
+        <a:xfrm>
+          <a:off x="0" y="0"/>
+          <a:ext cx="0" cy="0"/>
+          <a:chOff x="0" y="0"/>
+          <a:chExt cx="0" cy="0"/>
+        </a:xfrm>
+      </p:grpSpPr>
+      <p:sp>
+        <p:nvSpPr>
+          <p:cNvPr id="2" name="Slide Image Placeholder 1"/>
+          <p:cNvSpPr>
+            <a:spLocks noGrp="1"/>
+          </p:cNvSpPr>
+          <p:nvPr>
+            <p:ph type="sldImg" idx="2"/>
+          </p:nvPr>
+        </p:nvSpPr>
+        <p:spPr/>
+      </p:sp>
+      <p:sp>
+        <p:nvSpPr>
+          <p:cNvPr id="3" name="Notes Placeholder 2"/>
+          <p:cNvSpPr>
+            <a:spLocks noGrp="1"/>
+          </p:cNvSpPr>
+          <p:nvPr>
+            <p:ph type="body" idx="3" sz="quarter"/>
+          </p:nvPr>
+        </p:nvSpPr>
+        <p:spPr/>
+        <p:txBody>
+          <a:bodyPr/>
+          <a:lstStyle/>
+          <a:p>
+            <a:r>
+              <a:t>O listă cu un singur server pune toate cele trei noduri ale unui contact pe aceeași mașină. De aceea, mai multe servere într-o listă.</a:t>
+            </a:r>
+          </a:p>
+        </p:txBody>
+      </p:sp>
+      <p:sp>
+        <p:nvSpPr>
+          <p:cNvPr id="4" name="Slide Number Placeholder 3"/>
+          <p:cNvSpPr>
+            <a:spLocks noGrp="1"/>
+          </p:cNvSpPr>
+          <p:nvPr>
+            <p:ph type="sldNum" idx="5" sz="quarter"/>
+          </p:nvPr>
+        </p:nvSpPr>
+        <p:spPr/>
+      </p:sp>
+    </p:spTree>
+  </p:cSld>
+  <p:clrMapOvr>
+    <a:masterClrMapping/>
+  </p:clrMapOvr>
+</p:notes>
+</file>
+
+<file path=ppt/notesSlides/notesSlide7.xml><?xml version="1.0" encoding="utf-8"?>
+<p:notes xmlns:a="http://schemas.openxmlformats.org/drawingml/2006/main" xmlns:p="http://schemas.openxmlformats.org/presentationml/2006/main" xmlns:r="http://schemas.openxmlformats.org/officeDocument/2006/relationships">
+  <p:cSld>
+    <p:spTree>
+      <p:nvGrpSpPr>
+        <p:cNvPr id="1" name=""/>
+        <p:cNvGrpSpPr/>
+        <p:nvPr/>
+      </p:nvGrpSpPr>
+      <p:grpSpPr>
+        <a:xfrm>
+          <a:off x="0" y="0"/>
+          <a:ext cx="0" cy="0"/>
+          <a:chOff x="0" y="0"/>
+          <a:chExt cx="0" cy="0"/>
+        </a:xfrm>
+      </p:grpSpPr>
+      <p:sp>
+        <p:nvSpPr>
+          <p:cNvPr id="2" name="Slide Image Placeholder 1"/>
+          <p:cNvSpPr>
+            <a:spLocks noGrp="1"/>
+          </p:cNvSpPr>
+          <p:nvPr>
+            <p:ph type="sldImg" idx="2"/>
+          </p:nvPr>
+        </p:nvSpPr>
+        <p:spPr/>
+      </p:sp>
+      <p:sp>
+        <p:nvSpPr>
+          <p:cNvPr id="3" name="Notes Placeholder 2"/>
+          <p:cNvSpPr>
+            <a:spLocks noGrp="1"/>
+          </p:cNvSpPr>
+          <p:nvPr>
+            <p:ph type="body" idx="3" sz="quarter"/>
+          </p:nvPr>
+        </p:nvSpPr>
+        <p:spPr/>
+        <p:txBody>
+          <a:bodyPr/>
+          <a:lstStyle/>
+          <a:p>
+            <a:r>
+              <a:t>Formulați prudent: nu spunem că percheziția sau ordinele sunt inutile. Spunem că nu există un furnizor care să poată preda ceva și că un nod confiscat nu conține nimic lizibil. Evaluarea juridică se confirmă cu un avocat.</a:t>
+            </a:r>
+          </a:p>
+        </p:txBody>
+      </p:sp>
+      <p:sp>
+        <p:nvSpPr>
+          <p:cNvPr id="4" name="Slide Number Placeholder 3"/>
+          <p:cNvSpPr>
+            <a:spLocks noGrp="1"/>
+          </p:cNvSpPr>
+          <p:nvPr>
+            <p:ph type="sldNum" idx="5" sz="quarter"/>
+          </p:nvPr>
+        </p:nvSpPr>
+        <p:spPr/>
+      </p:sp>
+    </p:spTree>
+  </p:cSld>
+  <p:clrMapOvr>
+    <a:masterClrMapping/>
+  </p:clrMapOvr>
+</p:notes>
+</file>
+
+<file path=ppt/notesSlides/notesSlide8.xml><?xml version="1.0" encoding="utf-8"?>
+<p:notes xmlns:a="http://schemas.openxmlformats.org/drawingml/2006/main" xmlns:p="http://schemas.openxmlformats.org/presentationml/2006/main" xmlns:r="http://schemas.openxmlformats.org/officeDocument/2006/relationships">
+  <p:cSld>
+    <p:spTree>
+      <p:nvGrpSpPr>
+        <p:cNvPr id="1" name=""/>
+        <p:cNvGrpSpPr/>
+        <p:nvPr/>
+      </p:nvGrpSpPr>
+      <p:grpSpPr>
+        <a:xfrm>
+          <a:off x="0" y="0"/>
+          <a:ext cx="0" cy="0"/>
+          <a:chOff x="0" y="0"/>
+          <a:chExt cx="0" cy="0"/>
+        </a:xfrm>
+      </p:grpSpPr>
+      <p:sp>
+        <p:nvSpPr>
+          <p:cNvPr id="2" name="Slide Image Placeholder 1"/>
+          <p:cNvSpPr>
+            <a:spLocks noGrp="1"/>
+          </p:cNvSpPr>
+          <p:nvPr>
+            <p:ph type="sldImg" idx="2"/>
+          </p:nvPr>
+        </p:nvSpPr>
+        <p:spPr/>
+      </p:sp>
+      <p:sp>
+        <p:nvSpPr>
+          <p:cNvPr id="3" name="Notes Placeholder 2"/>
+          <p:cNvSpPr>
+            <a:spLocks noGrp="1"/>
+          </p:cNvSpPr>
+          <p:nvPr>
+            <p:ph type="body" idx="3" sz="quarter"/>
+          </p:nvPr>
+        </p:nvSpPr>
+        <p:spPr/>
+        <p:txBody>
+          <a:bodyPr/>
+          <a:lstStyle/>
+          <a:p>
+            <a:r>
+              <a:t>Eșaloanele 5, 25, 100, 250 sunt planificate, prețurile sunt deschise. Pentru client contează numărul de contacte cu adrese proprii, nu cel al nodurilor. Tehnic, un cod poate porni pe mai multe servere, limitarea la un singur server este prevăzută în contract.</a:t>
             </a:r>
           </a:p>
         </p:txBody>
@@ -3818,7 +4031,7 @@
         <p:spPr>
           <a:xfrm>
             <a:off x="0" y="0"/>
-            <a:ext cx="12192000" cy="6858000"/>
+            <a:ext cx="12191695" cy="6858000"/>
           </a:xfrm>
           <a:prstGeom prst="rect">
             <a:avLst/>
@@ -3845,7 +4058,7 @@
       <p:grpSpPr/>
       <p:pic>
         <p:nvPicPr>
-          <p:cNvPr id="2" name="Picture 1" descr="10-securitate.png"/>
+          <p:cNvPr id="2" name="Picture 1" descr="10-ce-vede.png"/>
           <p:cNvPicPr>
             <a:picLocks noChangeAspect="1"/>
           </p:cNvPicPr>
@@ -3860,7 +4073,7 @@
         <p:spPr>
           <a:xfrm>
             <a:off x="0" y="0"/>
-            <a:ext cx="12192000" cy="6858000"/>
+            <a:ext cx="12191695" cy="6858000"/>
           </a:xfrm>
           <a:prstGeom prst="rect">
             <a:avLst/>
@@ -3887,7 +4100,7 @@
       <p:grpSpPr/>
       <p:pic>
         <p:nvPicPr>
-          <p:cNvPr id="2" name="Picture 1" descr="11-conformitate.png"/>
+          <p:cNvPr id="2" name="Picture 1" descr="11-server.png"/>
           <p:cNvPicPr>
             <a:picLocks noChangeAspect="1"/>
           </p:cNvPicPr>
@@ -3902,7 +4115,7 @@
         <p:spPr>
           <a:xfrm>
             <a:off x="0" y="0"/>
-            <a:ext cx="12192000" cy="6858000"/>
+            <a:ext cx="12191695" cy="6858000"/>
           </a:xfrm>
           <a:prstGeom prst="rect">
             <a:avLst/>
@@ -3929,7 +4142,7 @@
       <p:grpSpPr/>
       <p:pic>
         <p:nvPicPr>
-          <p:cNvPr id="2" name="Picture 1" descr="12-pentru-cine.png"/>
+          <p:cNvPr id="2" name="Picture 1" descr="12-securitate.png"/>
           <p:cNvPicPr>
             <a:picLocks noChangeAspect="1"/>
           </p:cNvPicPr>
@@ -3944,7 +4157,7 @@
         <p:spPr>
           <a:xfrm>
             <a:off x="0" y="0"/>
-            <a:ext cx="12192000" cy="6858000"/>
+            <a:ext cx="12191695" cy="6858000"/>
           </a:xfrm>
           <a:prstGeom prst="rect">
             <a:avLst/>
@@ -3971,7 +4184,7 @@
       <p:grpSpPr/>
       <p:pic>
         <p:nvPicPr>
-          <p:cNvPr id="2" name="Picture 1" descr="13-stadiu.png"/>
+          <p:cNvPr id="2" name="Picture 1" descr="13-conformitate.png"/>
           <p:cNvPicPr>
             <a:picLocks noChangeAspect="1"/>
           </p:cNvPicPr>
@@ -3986,7 +4199,7 @@
         <p:spPr>
           <a:xfrm>
             <a:off x="0" y="0"/>
-            <a:ext cx="12192000" cy="6858000"/>
+            <a:ext cx="12191695" cy="6858000"/>
           </a:xfrm>
           <a:prstGeom prst="rect">
             <a:avLst/>
@@ -4013,7 +4226,7 @@
       <p:grpSpPr/>
       <p:pic>
         <p:nvPicPr>
-          <p:cNvPr id="2" name="Picture 1" descr="14-pasi.png"/>
+          <p:cNvPr id="2" name="Picture 1" descr="14-licenta.png"/>
           <p:cNvPicPr>
             <a:picLocks noChangeAspect="1"/>
           </p:cNvPicPr>
@@ -4028,7 +4241,133 @@
         <p:spPr>
           <a:xfrm>
             <a:off x="0" y="0"/>
-            <a:ext cx="12192000" cy="6858000"/>
+            <a:ext cx="12191695" cy="6858000"/>
+          </a:xfrm>
+          <a:prstGeom prst="rect">
+            <a:avLst/>
+          </a:prstGeom>
+        </p:spPr>
+      </p:pic>
+    </p:spTree>
+  </p:cSld>
+  <p:clrMapOvr>
+    <a:masterClrMapping/>
+  </p:clrMapOvr>
+</p:sld>
+</file>
+
+<file path=ppt/slides/slide15.xml><?xml version="1.0" encoding="utf-8"?>
+<p:sld xmlns:a="http://schemas.openxmlformats.org/drawingml/2006/main" xmlns:p="http://schemas.openxmlformats.org/presentationml/2006/main" xmlns:r="http://schemas.openxmlformats.org/officeDocument/2006/relationships">
+  <p:cSld>
+    <p:spTree>
+      <p:nvGrpSpPr>
+        <p:cNvPr id="1" name=""/>
+        <p:cNvGrpSpPr/>
+        <p:nvPr/>
+      </p:nvGrpSpPr>
+      <p:grpSpPr/>
+      <p:pic>
+        <p:nvPicPr>
+          <p:cNvPr id="2" name="Picture 1" descr="15-pentru-cine.png"/>
+          <p:cNvPicPr>
+            <a:picLocks noChangeAspect="1"/>
+          </p:cNvPicPr>
+          <p:nvPr/>
+        </p:nvPicPr>
+        <p:blipFill>
+          <a:blip r:embed="rId2"/>
+          <a:stretch>
+            <a:fillRect/>
+          </a:stretch>
+        </p:blipFill>
+        <p:spPr>
+          <a:xfrm>
+            <a:off x="0" y="0"/>
+            <a:ext cx="12191695" cy="6858000"/>
+          </a:xfrm>
+          <a:prstGeom prst="rect">
+            <a:avLst/>
+          </a:prstGeom>
+        </p:spPr>
+      </p:pic>
+    </p:spTree>
+  </p:cSld>
+  <p:clrMapOvr>
+    <a:masterClrMapping/>
+  </p:clrMapOvr>
+</p:sld>
+</file>
+
+<file path=ppt/slides/slide16.xml><?xml version="1.0" encoding="utf-8"?>
+<p:sld xmlns:a="http://schemas.openxmlformats.org/drawingml/2006/main" xmlns:p="http://schemas.openxmlformats.org/presentationml/2006/main" xmlns:r="http://schemas.openxmlformats.org/officeDocument/2006/relationships">
+  <p:cSld>
+    <p:spTree>
+      <p:nvGrpSpPr>
+        <p:cNvPr id="1" name=""/>
+        <p:cNvGrpSpPr/>
+        <p:nvPr/>
+      </p:nvGrpSpPr>
+      <p:grpSpPr/>
+      <p:pic>
+        <p:nvPicPr>
+          <p:cNvPr id="2" name="Picture 1" descr="16-stadiu.png"/>
+          <p:cNvPicPr>
+            <a:picLocks noChangeAspect="1"/>
+          </p:cNvPicPr>
+          <p:nvPr/>
+        </p:nvPicPr>
+        <p:blipFill>
+          <a:blip r:embed="rId2"/>
+          <a:stretch>
+            <a:fillRect/>
+          </a:stretch>
+        </p:blipFill>
+        <p:spPr>
+          <a:xfrm>
+            <a:off x="0" y="0"/>
+            <a:ext cx="12191695" cy="6858000"/>
+          </a:xfrm>
+          <a:prstGeom prst="rect">
+            <a:avLst/>
+          </a:prstGeom>
+        </p:spPr>
+      </p:pic>
+    </p:spTree>
+  </p:cSld>
+  <p:clrMapOvr>
+    <a:masterClrMapping/>
+  </p:clrMapOvr>
+</p:sld>
+</file>
+
+<file path=ppt/slides/slide17.xml><?xml version="1.0" encoding="utf-8"?>
+<p:sld xmlns:a="http://schemas.openxmlformats.org/drawingml/2006/main" xmlns:p="http://schemas.openxmlformats.org/presentationml/2006/main" xmlns:r="http://schemas.openxmlformats.org/officeDocument/2006/relationships">
+  <p:cSld>
+    <p:spTree>
+      <p:nvGrpSpPr>
+        <p:cNvPr id="1" name=""/>
+        <p:cNvGrpSpPr/>
+        <p:nvPr/>
+      </p:nvGrpSpPr>
+      <p:grpSpPr/>
+      <p:pic>
+        <p:nvPicPr>
+          <p:cNvPr id="2" name="Picture 1" descr="17-pasi.png"/>
+          <p:cNvPicPr>
+            <a:picLocks noChangeAspect="1"/>
+          </p:cNvPicPr>
+          <p:nvPr/>
+        </p:nvPicPr>
+        <p:blipFill>
+          <a:blip r:embed="rId2"/>
+          <a:stretch>
+            <a:fillRect/>
+          </a:stretch>
+        </p:blipFill>
+        <p:spPr>
+          <a:xfrm>
+            <a:off x="0" y="0"/>
+            <a:ext cx="12191695" cy="6858000"/>
           </a:xfrm>
           <a:prstGeom prst="rect">
             <a:avLst/>
@@ -4070,7 +4409,7 @@
         <p:spPr>
           <a:xfrm>
             <a:off x="0" y="0"/>
-            <a:ext cx="12192000" cy="6858000"/>
+            <a:ext cx="12191695" cy="6858000"/>
           </a:xfrm>
           <a:prstGeom prst="rect">
             <a:avLst/>
@@ -4112,7 +4451,7 @@
         <p:spPr>
           <a:xfrm>
             <a:off x="0" y="0"/>
-            <a:ext cx="12192000" cy="6858000"/>
+            <a:ext cx="12191695" cy="6858000"/>
           </a:xfrm>
           <a:prstGeom prst="rect">
             <a:avLst/>
@@ -4154,7 +4493,7 @@
         <p:spPr>
           <a:xfrm>
             <a:off x="0" y="0"/>
-            <a:ext cx="12192000" cy="6858000"/>
+            <a:ext cx="12191695" cy="6858000"/>
           </a:xfrm>
           <a:prstGeom prst="rect">
             <a:avLst/>
@@ -4196,7 +4535,7 @@
         <p:spPr>
           <a:xfrm>
             <a:off x="0" y="0"/>
-            <a:ext cx="12192000" cy="6858000"/>
+            <a:ext cx="12191695" cy="6858000"/>
           </a:xfrm>
           <a:prstGeom prst="rect">
             <a:avLst/>
@@ -4238,7 +4577,7 @@
         <p:spPr>
           <a:xfrm>
             <a:off x="0" y="0"/>
-            <a:ext cx="12192000" cy="6858000"/>
+            <a:ext cx="12191695" cy="6858000"/>
           </a:xfrm>
           <a:prstGeom prst="rect">
             <a:avLst/>
@@ -4280,7 +4619,7 @@
         <p:spPr>
           <a:xfrm>
             <a:off x="0" y="0"/>
-            <a:ext cx="12192000" cy="6858000"/>
+            <a:ext cx="12191695" cy="6858000"/>
           </a:xfrm>
           <a:prstGeom prst="rect">
             <a:avLst/>
@@ -4307,7 +4646,7 @@
       <p:grpSpPr/>
       <p:pic>
         <p:nvPicPr>
-          <p:cNvPr id="2" name="Picture 1" descr="08-ce-vede.png"/>
+          <p:cNvPr id="2" name="Picture 1" descr="08-rezilienta.png"/>
           <p:cNvPicPr>
             <a:picLocks noChangeAspect="1"/>
           </p:cNvPicPr>
@@ -4322,7 +4661,7 @@
         <p:spPr>
           <a:xfrm>
             <a:off x="0" y="0"/>
-            <a:ext cx="12192000" cy="6858000"/>
+            <a:ext cx="12191695" cy="6858000"/>
           </a:xfrm>
           <a:prstGeom prst="rect">
             <a:avLst/>
@@ -4349,7 +4688,7 @@
       <p:grpSpPr/>
       <p:pic>
         <p:nvPicPr>
-          <p:cNvPr id="2" name="Picture 1" descr="09-server.png"/>
+          <p:cNvPr id="2" name="Picture 1" descr="09-liste.png"/>
           <p:cNvPicPr>
             <a:picLocks noChangeAspect="1"/>
           </p:cNvPicPr>
@@ -4364,7 +4703,7 @@
         <p:spPr>
           <a:xfrm>
             <a:off x="0" y="0"/>
-            <a:ext cx="12192000" cy="6858000"/>
+            <a:ext cx="12191695" cy="6858000"/>
           </a:xfrm>
           <a:prstGeom prst="rect">
             <a:avLst/>

--- a/unpruuf/presentations/export/unpruuf_Business_RO.pptx
+++ b/unpruuf/presentations/export/unpruuf_Business_RO.pptx
@@ -22,6 +22,7 @@
     <p:sldId id="270" r:id="rId22"/>
     <p:sldId id="271" r:id="rId23"/>
     <p:sldId id="272" r:id="rId24"/>
+    <p:sldId id="273" r:id="rId25"/>
   </p:sldIdLst>
   <p:sldSz cx="12191695" cy="6858000" type="screen4x3"/>
   <p:notesSz cx="6858000" cy="9144000"/>
@@ -728,7 +729,7 @@
           <a:lstStyle/>
           <a:p>
             <a:r>
-              <a:t>Măsurat fără rețeaua Tor reală: 500 de noduri într-un proces, aproximativ 85 MB RAM. Încărcarea rețelei pe un VPS real nu este încă măsurată. 250 de contacte este valabil la trei servere cu câte 250 de noduri, fiindcă fiecare contact primește un nod pe server.</a:t>
+              <a:t>Dintr-o suflare: fără număr de telefon, fără e-mail. Un cod pentru fiecare persoană. Ștergeți contactul și legătura dispare. Apoi limita onestă: ce s-a primit deja rămâne, iar celelalte canale nu sunt atinse. Nu spuneți că este o protecție împotriva a tot.</a:t>
             </a:r>
           </a:p>
         </p:txBody>
@@ -798,7 +799,7 @@
           <a:lstStyle/>
           <a:p>
             <a:r>
-              <a:t>Recomandarea trei furnizori, două țări rămâne la latitudinea clientului: aplicația nu poate verifica dacă trei servere sunt la același furnizor. După o repornire, fiecare server rămâne blocat până când aplicația îl deblochează. Cât timp unul este blocat, ceilalți preiau.</a:t>
+              <a:t>Măsurat fără rețeaua Tor reală: 500 de noduri într-un proces, aproximativ 85 MB RAM. Încărcarea rețelei pe un VPS real nu este încă măsurată. 250 de contacte este valabil la trei servere cu câte 250 de noduri, fiindcă fiecare contact primește un nod pe server.</a:t>
             </a:r>
           </a:p>
         </p:txBody>
@@ -868,7 +869,7 @@
           <a:lstStyle/>
           <a:p>
             <a:r>
-              <a:t>O listă cu un singur server pune toate cele trei noduri ale unui contact pe aceeași mașină. De aceea, mai multe servere într-o listă.</a:t>
+              <a:t>Recomandarea trei furnizori, două țări rămâne la latitudinea clientului: aplicația nu poate verifica dacă trei servere sunt la același furnizor. După o repornire, fiecare server rămâne blocat până când aplicația îl deblochează. Cât timp unul este blocat, ceilalți preiau.</a:t>
             </a:r>
           </a:p>
         </p:txBody>
@@ -938,7 +939,7 @@
           <a:lstStyle/>
           <a:p>
             <a:r>
-              <a:t>Formulați prudent: nu spunem că percheziția sau ordinele sunt inutile. Spunem că nu există un furnizor care să poată preda ceva și că un nod confiscat nu conține nimic lizibil. Evaluarea juridică se confirmă cu un avocat.</a:t>
+              <a:t>O listă cu un singur server pune toate cele trei noduri ale unui contact pe aceeași mașină. De aceea, mai multe servere într-o listă.</a:t>
             </a:r>
           </a:p>
         </p:txBody>
@@ -964,6 +965,76 @@
 </file>
 
 <file path=ppt/notesSlides/notesSlide8.xml><?xml version="1.0" encoding="utf-8"?>
+<p:notes xmlns:a="http://schemas.openxmlformats.org/drawingml/2006/main" xmlns:p="http://schemas.openxmlformats.org/presentationml/2006/main" xmlns:r="http://schemas.openxmlformats.org/officeDocument/2006/relationships">
+  <p:cSld>
+    <p:spTree>
+      <p:nvGrpSpPr>
+        <p:cNvPr id="1" name=""/>
+        <p:cNvGrpSpPr/>
+        <p:nvPr/>
+      </p:nvGrpSpPr>
+      <p:grpSpPr>
+        <a:xfrm>
+          <a:off x="0" y="0"/>
+          <a:ext cx="0" cy="0"/>
+          <a:chOff x="0" y="0"/>
+          <a:chExt cx="0" cy="0"/>
+        </a:xfrm>
+      </p:grpSpPr>
+      <p:sp>
+        <p:nvSpPr>
+          <p:cNvPr id="2" name="Slide Image Placeholder 1"/>
+          <p:cNvSpPr>
+            <a:spLocks noGrp="1"/>
+          </p:cNvSpPr>
+          <p:nvPr>
+            <p:ph type="sldImg" idx="2"/>
+          </p:nvPr>
+        </p:nvSpPr>
+        <p:spPr/>
+      </p:sp>
+      <p:sp>
+        <p:nvSpPr>
+          <p:cNvPr id="3" name="Notes Placeholder 2"/>
+          <p:cNvSpPr>
+            <a:spLocks noGrp="1"/>
+          </p:cNvSpPr>
+          <p:nvPr>
+            <p:ph type="body" idx="3" sz="quarter"/>
+          </p:nvPr>
+        </p:nvSpPr>
+        <p:spPr/>
+        <p:txBody>
+          <a:bodyPr/>
+          <a:lstStyle/>
+          <a:p>
+            <a:r>
+              <a:t>Formulați prudent: nu spunem că percheziția sau ordinele sunt inutile. Spunem că nu există un furnizor care să poată preda ceva și că un nod confiscat nu conține nimic lizibil. Evaluarea juridică se confirmă cu un avocat.</a:t>
+            </a:r>
+          </a:p>
+        </p:txBody>
+      </p:sp>
+      <p:sp>
+        <p:nvSpPr>
+          <p:cNvPr id="4" name="Slide Number Placeholder 3"/>
+          <p:cNvSpPr>
+            <a:spLocks noGrp="1"/>
+          </p:cNvSpPr>
+          <p:nvPr>
+            <p:ph type="sldNum" idx="5" sz="quarter"/>
+          </p:nvPr>
+        </p:nvSpPr>
+        <p:spPr/>
+      </p:sp>
+    </p:spTree>
+  </p:cSld>
+  <p:clrMapOvr>
+    <a:masterClrMapping/>
+  </p:clrMapOvr>
+</p:notes>
+</file>
+
+<file path=ppt/notesSlides/notesSlide9.xml><?xml version="1.0" encoding="utf-8"?>
 <p:notes xmlns:a="http://schemas.openxmlformats.org/drawingml/2006/main" xmlns:p="http://schemas.openxmlformats.org/presentationml/2006/main" xmlns:r="http://schemas.openxmlformats.org/officeDocument/2006/relationships">
   <p:cSld>
     <p:spTree>
@@ -4058,7 +4129,7 @@
       <p:grpSpPr/>
       <p:pic>
         <p:nvPicPr>
-          <p:cNvPr id="2" name="Picture 1" descr="10-ce-vede.png"/>
+          <p:cNvPr id="2" name="Picture 1" descr="10-liste.png"/>
           <p:cNvPicPr>
             <a:picLocks noChangeAspect="1"/>
           </p:cNvPicPr>
@@ -4100,7 +4171,7 @@
       <p:grpSpPr/>
       <p:pic>
         <p:nvPicPr>
-          <p:cNvPr id="2" name="Picture 1" descr="11-server.png"/>
+          <p:cNvPr id="2" name="Picture 1" descr="11-ce-vede.png"/>
           <p:cNvPicPr>
             <a:picLocks noChangeAspect="1"/>
           </p:cNvPicPr>
@@ -4142,7 +4213,7 @@
       <p:grpSpPr/>
       <p:pic>
         <p:nvPicPr>
-          <p:cNvPr id="2" name="Picture 1" descr="12-securitate.png"/>
+          <p:cNvPr id="2" name="Picture 1" descr="12-server.png"/>
           <p:cNvPicPr>
             <a:picLocks noChangeAspect="1"/>
           </p:cNvPicPr>
@@ -4184,7 +4255,7 @@
       <p:grpSpPr/>
       <p:pic>
         <p:nvPicPr>
-          <p:cNvPr id="2" name="Picture 1" descr="13-conformitate.png"/>
+          <p:cNvPr id="2" name="Picture 1" descr="13-securitate.png"/>
           <p:cNvPicPr>
             <a:picLocks noChangeAspect="1"/>
           </p:cNvPicPr>
@@ -4226,7 +4297,7 @@
       <p:grpSpPr/>
       <p:pic>
         <p:nvPicPr>
-          <p:cNvPr id="2" name="Picture 1" descr="14-licenta.png"/>
+          <p:cNvPr id="2" name="Picture 1" descr="14-conformitate.png"/>
           <p:cNvPicPr>
             <a:picLocks noChangeAspect="1"/>
           </p:cNvPicPr>
@@ -4268,7 +4339,7 @@
       <p:grpSpPr/>
       <p:pic>
         <p:nvPicPr>
-          <p:cNvPr id="2" name="Picture 1" descr="15-pentru-cine.png"/>
+          <p:cNvPr id="2" name="Picture 1" descr="15-licenta.png"/>
           <p:cNvPicPr>
             <a:picLocks noChangeAspect="1"/>
           </p:cNvPicPr>
@@ -4310,7 +4381,7 @@
       <p:grpSpPr/>
       <p:pic>
         <p:nvPicPr>
-          <p:cNvPr id="2" name="Picture 1" descr="16-stadiu.png"/>
+          <p:cNvPr id="2" name="Picture 1" descr="16-pentru-cine.png"/>
           <p:cNvPicPr>
             <a:picLocks noChangeAspect="1"/>
           </p:cNvPicPr>
@@ -4352,7 +4423,49 @@
       <p:grpSpPr/>
       <p:pic>
         <p:nvPicPr>
-          <p:cNvPr id="2" name="Picture 1" descr="17-pasi.png"/>
+          <p:cNvPr id="2" name="Picture 1" descr="17-stadiu.png"/>
+          <p:cNvPicPr>
+            <a:picLocks noChangeAspect="1"/>
+          </p:cNvPicPr>
+          <p:nvPr/>
+        </p:nvPicPr>
+        <p:blipFill>
+          <a:blip r:embed="rId2"/>
+          <a:stretch>
+            <a:fillRect/>
+          </a:stretch>
+        </p:blipFill>
+        <p:spPr>
+          <a:xfrm>
+            <a:off x="0" y="0"/>
+            <a:ext cx="12191695" cy="6858000"/>
+          </a:xfrm>
+          <a:prstGeom prst="rect">
+            <a:avLst/>
+          </a:prstGeom>
+        </p:spPr>
+      </p:pic>
+    </p:spTree>
+  </p:cSld>
+  <p:clrMapOvr>
+    <a:masterClrMapping/>
+  </p:clrMapOvr>
+</p:sld>
+</file>
+
+<file path=ppt/slides/slide18.xml><?xml version="1.0" encoding="utf-8"?>
+<p:sld xmlns:a="http://schemas.openxmlformats.org/drawingml/2006/main" xmlns:p="http://schemas.openxmlformats.org/presentationml/2006/main" xmlns:r="http://schemas.openxmlformats.org/officeDocument/2006/relationships">
+  <p:cSld>
+    <p:spTree>
+      <p:nvGrpSpPr>
+        <p:cNvPr id="1" name=""/>
+        <p:cNvGrpSpPr/>
+        <p:nvPr/>
+      </p:nvGrpSpPr>
+      <p:grpSpPr/>
+      <p:pic>
+        <p:nvPicPr>
+          <p:cNvPr id="2" name="Picture 1" descr="18-pasi.png"/>
           <p:cNvPicPr>
             <a:picLocks noChangeAspect="1"/>
           </p:cNvPicPr>
@@ -4604,7 +4717,7 @@
       <p:grpSpPr/>
       <p:pic>
         <p:nvPicPr>
-          <p:cNvPr id="2" name="Picture 1" descr="07-sute-noduri.png"/>
+          <p:cNvPr id="2" name="Picture 1" descr="07-fara-numar.png"/>
           <p:cNvPicPr>
             <a:picLocks noChangeAspect="1"/>
           </p:cNvPicPr>
@@ -4646,7 +4759,7 @@
       <p:grpSpPr/>
       <p:pic>
         <p:nvPicPr>
-          <p:cNvPr id="2" name="Picture 1" descr="08-rezilienta.png"/>
+          <p:cNvPr id="2" name="Picture 1" descr="08-sute-noduri.png"/>
           <p:cNvPicPr>
             <a:picLocks noChangeAspect="1"/>
           </p:cNvPicPr>
@@ -4688,7 +4801,7 @@
       <p:grpSpPr/>
       <p:pic>
         <p:nvPicPr>
-          <p:cNvPr id="2" name="Picture 1" descr="09-liste.png"/>
+          <p:cNvPr id="2" name="Picture 1" descr="09-rezilienta.png"/>
           <p:cNvPicPr>
             <a:picLocks noChangeAspect="1"/>
           </p:cNvPicPr>
